--- a/chapter6/parts/part-02-types-and-central-tendency/clip.pptx
+++ b/chapter6/parts/part-02-types-and-central-tendency/clip.pptx
@@ -4242,7 +4242,7 @@
               </a:defRPr>
             </a:pPr>
             <a:r>
-              <a:t>Chapter 6 — 02 Types And Central Tendency</a:t>
+              <a:t>Chapter 6 — Types And Central Tendency</a:t>
             </a:r>
           </a:p>
         </p:txBody>
@@ -4401,7 +4401,7 @@
               </a:defRPr>
             </a:pPr>
             <a:r>
-              <a:t>Chapter 6 — 02 Types And Central Tendency</a:t>
+              <a:t>Chapter 6 — Types And Central Tendency</a:t>
             </a:r>
           </a:p>
         </p:txBody>
@@ -4580,7 +4580,7 @@
               </a:defRPr>
             </a:pPr>
             <a:r>
-              <a:t>Chapter 6 — 02 Types And Central Tendency</a:t>
+              <a:t>Chapter 6 — Types And Central Tendency</a:t>
             </a:r>
           </a:p>
         </p:txBody>
@@ -4779,7 +4779,7 @@
               </a:defRPr>
             </a:pPr>
             <a:r>
-              <a:t>Chapter 6 — 02 Types And Central Tendency</a:t>
+              <a:t>Chapter 6 — Types And Central Tendency</a:t>
             </a:r>
           </a:p>
         </p:txBody>
@@ -4998,7 +4998,7 @@
               </a:defRPr>
             </a:pPr>
             <a:r>
-              <a:t>Chapter 6 — 02 Types And Central Tendency</a:t>
+              <a:t>Chapter 6 — Types And Central Tendency</a:t>
             </a:r>
           </a:p>
         </p:txBody>
@@ -5177,7 +5177,7 @@
               </a:defRPr>
             </a:pPr>
             <a:r>
-              <a:t>Chapter 6 — 02 Types And Central Tendency</a:t>
+              <a:t>Chapter 6 — Types And Central Tendency</a:t>
             </a:r>
           </a:p>
         </p:txBody>
@@ -5356,7 +5356,7 @@
               </a:defRPr>
             </a:pPr>
             <a:r>
-              <a:t>Chapter 6 — 02 Types And Central Tendency</a:t>
+              <a:t>Chapter 6 — Types And Central Tendency</a:t>
             </a:r>
           </a:p>
         </p:txBody>
@@ -5535,7 +5535,7 @@
               </a:defRPr>
             </a:pPr>
             <a:r>
-              <a:t>Chapter 6 — 02 Types And Central Tendency</a:t>
+              <a:t>Chapter 6 — Types And Central Tendency</a:t>
             </a:r>
           </a:p>
         </p:txBody>
@@ -5694,7 +5694,7 @@
               </a:defRPr>
             </a:pPr>
             <a:r>
-              <a:t>Chapter 6 — 02 Types And Central Tendency</a:t>
+              <a:t>Chapter 6 — Types And Central Tendency</a:t>
             </a:r>
           </a:p>
         </p:txBody>
@@ -5873,7 +5873,7 @@
               </a:defRPr>
             </a:pPr>
             <a:r>
-              <a:t>Chapter 6 — 02 Types And Central Tendency</a:t>
+              <a:t>Chapter 6 — Types And Central Tendency</a:t>
             </a:r>
           </a:p>
         </p:txBody>

--- a/chapter6/parts/part-02-types-and-central-tendency/clip.pptx
+++ b/chapter6/parts/part-02-types-and-central-tendency/clip.pptx
@@ -4326,10 +4326,12 @@
           </a:bodyPr>
           <a:lstStyle/>
           <a:p>
-            <a:pPr>
+            <a:pPr lvl="0" marL="457200" indent="-228600">
+              <a:buFont typeface="Calibri"/>
               <a:spcAft>
                 <a:spcPts val="1000"/>
               </a:spcAft>
+              <a:buSzPct val="100000"/>
               <a:buChar char="•"/>
               <a:lnSpc>
                 <a:spcPts val="2200"/>
@@ -4346,10 +4348,12 @@
             </a:r>
           </a:p>
           <a:p>
-            <a:pPr>
+            <a:pPr lvl="0" marL="457200" indent="-228600">
+              <a:buFont typeface="Calibri"/>
               <a:spcAft>
                 <a:spcPts val="1000"/>
               </a:spcAft>
+              <a:buSzPct val="100000"/>
               <a:buChar char="•"/>
               <a:lnSpc>
                 <a:spcPts val="2200"/>
@@ -4485,10 +4489,12 @@
           </a:bodyPr>
           <a:lstStyle/>
           <a:p>
-            <a:pPr>
+            <a:pPr lvl="0" marL="457200" indent="-228600">
+              <a:buFont typeface="Calibri"/>
               <a:spcAft>
                 <a:spcPts val="1000"/>
               </a:spcAft>
+              <a:buSzPct val="100000"/>
               <a:buChar char="•"/>
               <a:lnSpc>
                 <a:spcPts val="2200"/>
@@ -4505,10 +4511,12 @@
             </a:r>
           </a:p>
           <a:p>
-            <a:pPr>
+            <a:pPr lvl="0" marL="457200" indent="-228600">
+              <a:buFont typeface="Calibri"/>
               <a:spcAft>
                 <a:spcPts val="1000"/>
               </a:spcAft>
+              <a:buSzPct val="100000"/>
               <a:buChar char="•"/>
               <a:lnSpc>
                 <a:spcPts val="2200"/>
@@ -4525,10 +4533,12 @@
             </a:r>
           </a:p>
           <a:p>
-            <a:pPr>
+            <a:pPr lvl="0" marL="457200" indent="-228600">
+              <a:buFont typeface="Calibri"/>
               <a:spcAft>
                 <a:spcPts val="1000"/>
               </a:spcAft>
+              <a:buSzPct val="100000"/>
               <a:buChar char="•"/>
               <a:lnSpc>
                 <a:spcPts val="2200"/>
@@ -4664,10 +4674,12 @@
           </a:bodyPr>
           <a:lstStyle/>
           <a:p>
-            <a:pPr>
+            <a:pPr lvl="0" marL="457200" indent="-228600">
+              <a:buFont typeface="Calibri"/>
               <a:spcAft>
                 <a:spcPts val="1000"/>
               </a:spcAft>
+              <a:buSzPct val="100000"/>
               <a:buChar char="•"/>
               <a:lnSpc>
                 <a:spcPts val="2200"/>
@@ -4684,10 +4696,12 @@
             </a:r>
           </a:p>
           <a:p>
-            <a:pPr>
+            <a:pPr lvl="0" marL="457200" indent="-228600">
+              <a:buFont typeface="Calibri"/>
               <a:spcAft>
                 <a:spcPts val="1000"/>
               </a:spcAft>
+              <a:buSzPct val="100000"/>
               <a:buChar char="•"/>
               <a:lnSpc>
                 <a:spcPts val="2200"/>
@@ -4704,10 +4718,12 @@
             </a:r>
           </a:p>
           <a:p>
-            <a:pPr>
+            <a:pPr lvl="0" marL="457200" indent="-228600">
+              <a:buFont typeface="Calibri"/>
               <a:spcAft>
                 <a:spcPts val="1000"/>
               </a:spcAft>
+              <a:buSzPct val="100000"/>
               <a:buChar char="•"/>
               <a:lnSpc>
                 <a:spcPts val="2200"/>
@@ -4724,10 +4740,12 @@
             </a:r>
           </a:p>
           <a:p>
-            <a:pPr>
+            <a:pPr lvl="0" marL="457200" indent="-228600">
+              <a:buFont typeface="Calibri"/>
               <a:spcAft>
                 <a:spcPts val="1000"/>
               </a:spcAft>
+              <a:buSzPct val="100000"/>
               <a:buChar char="•"/>
               <a:lnSpc>
                 <a:spcPts val="2200"/>
@@ -4863,10 +4881,12 @@
           </a:bodyPr>
           <a:lstStyle/>
           <a:p>
-            <a:pPr>
+            <a:pPr lvl="0" marL="457200" indent="-228600">
+              <a:buFont typeface="Calibri"/>
               <a:spcAft>
                 <a:spcPts val="1000"/>
               </a:spcAft>
+              <a:buSzPct val="100000"/>
               <a:buChar char="•"/>
               <a:lnSpc>
                 <a:spcPts val="2200"/>
@@ -4883,10 +4903,12 @@
             </a:r>
           </a:p>
           <a:p>
-            <a:pPr>
+            <a:pPr lvl="0" marL="457200" indent="-228600">
+              <a:buFont typeface="Calibri"/>
               <a:spcAft>
                 <a:spcPts val="1000"/>
               </a:spcAft>
+              <a:buSzPct val="100000"/>
               <a:buChar char="•"/>
               <a:lnSpc>
                 <a:spcPts val="2200"/>
@@ -4903,10 +4925,12 @@
             </a:r>
           </a:p>
           <a:p>
-            <a:pPr>
+            <a:pPr lvl="0" marL="457200" indent="-228600">
+              <a:buFont typeface="Calibri"/>
               <a:spcAft>
                 <a:spcPts val="1000"/>
               </a:spcAft>
+              <a:buSzPct val="100000"/>
               <a:buChar char="•"/>
               <a:lnSpc>
                 <a:spcPts val="2200"/>
@@ -4923,10 +4947,12 @@
             </a:r>
           </a:p>
           <a:p>
-            <a:pPr>
+            <a:pPr lvl="0" marL="457200" indent="-228600">
+              <a:buFont typeface="Calibri"/>
               <a:spcAft>
                 <a:spcPts val="1000"/>
               </a:spcAft>
+              <a:buSzPct val="100000"/>
               <a:buChar char="•"/>
               <a:lnSpc>
                 <a:spcPts val="2200"/>
@@ -4943,10 +4969,12 @@
             </a:r>
           </a:p>
           <a:p>
-            <a:pPr>
+            <a:pPr lvl="0" marL="457200" indent="-228600">
+              <a:buFont typeface="Calibri"/>
               <a:spcAft>
                 <a:spcPts val="1000"/>
               </a:spcAft>
+              <a:buSzPct val="100000"/>
               <a:buChar char="•"/>
               <a:lnSpc>
                 <a:spcPts val="2200"/>
@@ -5082,10 +5110,12 @@
           </a:bodyPr>
           <a:lstStyle/>
           <a:p>
-            <a:pPr>
+            <a:pPr lvl="0" marL="457200" indent="-228600">
+              <a:buFont typeface="Calibri"/>
               <a:spcAft>
                 <a:spcPts val="1000"/>
               </a:spcAft>
+              <a:buSzPct val="100000"/>
               <a:buChar char="•"/>
               <a:lnSpc>
                 <a:spcPts val="2200"/>
@@ -5102,10 +5132,12 @@
             </a:r>
           </a:p>
           <a:p>
-            <a:pPr>
+            <a:pPr lvl="0" marL="457200" indent="-228600">
+              <a:buFont typeface="Calibri"/>
               <a:spcAft>
                 <a:spcPts val="1000"/>
               </a:spcAft>
+              <a:buSzPct val="100000"/>
               <a:buChar char="•"/>
               <a:lnSpc>
                 <a:spcPts val="2200"/>
@@ -5122,10 +5154,12 @@
             </a:r>
           </a:p>
           <a:p>
-            <a:pPr>
+            <a:pPr lvl="0" marL="457200" indent="-228600">
+              <a:buFont typeface="Calibri"/>
               <a:spcAft>
                 <a:spcPts val="1000"/>
               </a:spcAft>
+              <a:buSzPct val="100000"/>
               <a:buChar char="•"/>
               <a:lnSpc>
                 <a:spcPts val="2200"/>
@@ -5261,10 +5295,12 @@
           </a:bodyPr>
           <a:lstStyle/>
           <a:p>
-            <a:pPr>
+            <a:pPr lvl="0" marL="457200" indent="-228600">
+              <a:buFont typeface="Calibri"/>
               <a:spcAft>
                 <a:spcPts val="1000"/>
               </a:spcAft>
+              <a:buSzPct val="100000"/>
               <a:buChar char="•"/>
               <a:lnSpc>
                 <a:spcPts val="2200"/>
@@ -5281,10 +5317,12 @@
             </a:r>
           </a:p>
           <a:p>
-            <a:pPr>
+            <a:pPr lvl="0" marL="457200" indent="-228600">
+              <a:buFont typeface="Calibri"/>
               <a:spcAft>
                 <a:spcPts val="1000"/>
               </a:spcAft>
+              <a:buSzPct val="100000"/>
               <a:buChar char="•"/>
               <a:lnSpc>
                 <a:spcPts val="2200"/>
@@ -5301,10 +5339,12 @@
             </a:r>
           </a:p>
           <a:p>
-            <a:pPr>
+            <a:pPr lvl="0" marL="457200" indent="-228600">
+              <a:buFont typeface="Calibri"/>
               <a:spcAft>
                 <a:spcPts val="1000"/>
               </a:spcAft>
+              <a:buSzPct val="100000"/>
               <a:buChar char="•"/>
               <a:lnSpc>
                 <a:spcPts val="2200"/>
@@ -5440,10 +5480,12 @@
           </a:bodyPr>
           <a:lstStyle/>
           <a:p>
-            <a:pPr>
+            <a:pPr lvl="0" marL="457200" indent="-228600">
+              <a:buFont typeface="Calibri"/>
               <a:spcAft>
                 <a:spcPts val="1000"/>
               </a:spcAft>
+              <a:buSzPct val="100000"/>
               <a:buChar char="•"/>
               <a:lnSpc>
                 <a:spcPts val="2200"/>
@@ -5460,10 +5502,12 @@
             </a:r>
           </a:p>
           <a:p>
-            <a:pPr>
+            <a:pPr lvl="0" marL="457200" indent="-228600">
+              <a:buFont typeface="Calibri"/>
               <a:spcAft>
                 <a:spcPts val="1000"/>
               </a:spcAft>
+              <a:buSzPct val="100000"/>
               <a:buChar char="•"/>
               <a:lnSpc>
                 <a:spcPts val="2200"/>
@@ -5480,10 +5524,12 @@
             </a:r>
           </a:p>
           <a:p>
-            <a:pPr>
+            <a:pPr lvl="0" marL="457200" indent="-228600">
+              <a:buFont typeface="Calibri"/>
               <a:spcAft>
                 <a:spcPts val="1000"/>
               </a:spcAft>
+              <a:buSzPct val="100000"/>
               <a:buChar char="•"/>
               <a:lnSpc>
                 <a:spcPts val="2200"/>
@@ -5619,10 +5665,12 @@
           </a:bodyPr>
           <a:lstStyle/>
           <a:p>
-            <a:pPr>
+            <a:pPr lvl="0" marL="457200" indent="-228600">
+              <a:buFont typeface="Calibri"/>
               <a:spcAft>
                 <a:spcPts val="1000"/>
               </a:spcAft>
+              <a:buSzPct val="100000"/>
               <a:buChar char="•"/>
               <a:lnSpc>
                 <a:spcPts val="2200"/>
@@ -5639,10 +5687,12 @@
             </a:r>
           </a:p>
           <a:p>
-            <a:pPr>
+            <a:pPr lvl="0" marL="457200" indent="-228600">
+              <a:buFont typeface="Calibri"/>
               <a:spcAft>
                 <a:spcPts val="1000"/>
               </a:spcAft>
+              <a:buSzPct val="100000"/>
               <a:buChar char="•"/>
               <a:lnSpc>
                 <a:spcPts val="2200"/>
@@ -5778,10 +5828,12 @@
           </a:bodyPr>
           <a:lstStyle/>
           <a:p>
-            <a:pPr>
+            <a:pPr lvl="0" marL="457200" indent="-228600">
+              <a:buFont typeface="Calibri"/>
               <a:spcAft>
                 <a:spcPts val="1000"/>
               </a:spcAft>
+              <a:buSzPct val="100000"/>
               <a:buChar char="•"/>
               <a:lnSpc>
                 <a:spcPts val="2200"/>
@@ -5798,10 +5850,12 @@
             </a:r>
           </a:p>
           <a:p>
-            <a:pPr>
+            <a:pPr lvl="0" marL="457200" indent="-228600">
+              <a:buFont typeface="Calibri"/>
               <a:spcAft>
                 <a:spcPts val="1000"/>
               </a:spcAft>
+              <a:buSzPct val="100000"/>
               <a:buChar char="•"/>
               <a:lnSpc>
                 <a:spcPts val="2200"/>
@@ -5818,10 +5872,12 @@
             </a:r>
           </a:p>
           <a:p>
-            <a:pPr>
+            <a:pPr lvl="0" marL="457200" indent="-228600">
+              <a:buFont typeface="Calibri"/>
               <a:spcAft>
                 <a:spcPts val="1000"/>
               </a:spcAft>
+              <a:buSzPct val="100000"/>
               <a:buChar char="•"/>
               <a:lnSpc>
                 <a:spcPts val="2200"/>
